--- a/Release/PPT_Assignment1.pptx
+++ b/Release/PPT_Assignment1.pptx
@@ -5,18 +5,18 @@
     <p:sldMasterId id="2147483648" r:id="rId1"/>
   </p:sldMasterIdLst>
   <p:sldIdLst>
-    <p:sldId id="256" r:id="rId3"/>
-    <p:sldId id="257" r:id="rId4"/>
-    <p:sldId id="258" r:id="rId5"/>
-    <p:sldId id="259" r:id="rId6"/>
-    <p:sldId id="260" r:id="rId7"/>
-    <p:sldId id="261" r:id="rId8"/>
-    <p:sldId id="262" r:id="rId9"/>
-    <p:sldId id="263" r:id="rId10"/>
-    <p:sldId id="264" r:id="rId11"/>
-    <p:sldId id="265" r:id="rId12"/>
-    <p:sldId id="266" r:id="rId13"/>
-    <p:sldId id="267" r:id="rId14"/>
+    <p:sldId id="256" r:id="rId2"/>
+    <p:sldId id="257" r:id="rId3"/>
+    <p:sldId id="258" r:id="rId4"/>
+    <p:sldId id="259" r:id="rId5"/>
+    <p:sldId id="260" r:id="rId6"/>
+    <p:sldId id="261" r:id="rId7"/>
+    <p:sldId id="262" r:id="rId8"/>
+    <p:sldId id="263" r:id="rId9"/>
+    <p:sldId id="264" r:id="rId10"/>
+    <p:sldId id="265" r:id="rId11"/>
+    <p:sldId id="266" r:id="rId12"/>
+    <p:sldId id="267" r:id="rId13"/>
   </p:sldIdLst>
   <p:sldSz cx="12192000" cy="6858000"/>
   <p:notesSz cx="6858000" cy="9144000"/>
@@ -115,6 +115,11 @@
       </a:defRPr>
     </a:lvl9pPr>
   </p:defaultTextStyle>
+  <p:extLst>
+    <p:ext uri="{EFAFB233-063F-42B5-8137-9DF3F51BA10A}">
+      <p15:sldGuideLst xmlns:p15="http://schemas.microsoft.com/office/powerpoint/2012/main"/>
+    </p:ext>
+  </p:extLst>
 </p:presentation>
 </file>
 
@@ -163,7 +168,6 @@
               <a:rPr lang="zh-CN" altLang="en-US"/>
               <a:t>单击此处编辑母版标题样式</a:t>
             </a:r>
-            <a:endParaRPr lang="zh-CN" altLang="en-US"/>
           </a:p>
         </p:txBody>
       </p:sp>
@@ -228,7 +232,6 @@
               <a:rPr lang="zh-CN" altLang="en-US"/>
               <a:t>单击此处编辑母版副标题样式</a:t>
             </a:r>
-            <a:endParaRPr lang="zh-CN" altLang="en-US"/>
           </a:p>
         </p:txBody>
       </p:sp>
@@ -249,6 +252,7 @@
           <a:p>
             <a:fld id="{A117251D-157D-4A93-8860-3E51ED663E19}" type="datetimeFigureOut">
               <a:rPr lang="zh-CN" altLang="en-US" smtClean="0"/>
+              <a:t>2026/4/10</a:t>
             </a:fld>
             <a:endParaRPr lang="zh-CN" altLang="en-US"/>
           </a:p>
@@ -290,6 +294,7 @@
           <a:p>
             <a:fld id="{B2FC78E8-33C0-47C5-AF77-A559993EE5A7}" type="slidenum">
               <a:rPr lang="zh-CN" altLang="en-US" smtClean="0"/>
+              <a:t>‹#›</a:t>
             </a:fld>
             <a:endParaRPr lang="zh-CN" altLang="en-US"/>
           </a:p>
@@ -339,7 +344,6 @@
               <a:rPr lang="zh-CN" altLang="en-US"/>
               <a:t>单击此处编辑母版标题样式</a:t>
             </a:r>
-            <a:endParaRPr lang="zh-CN" altLang="en-US"/>
           </a:p>
         </p:txBody>
       </p:sp>
@@ -363,7 +367,6 @@
               <a:rPr lang="zh-CN" altLang="en-US"/>
               <a:t>单击此处编辑母版文本样式</a:t>
             </a:r>
-            <a:endParaRPr lang="zh-CN" altLang="en-US"/>
           </a:p>
           <a:p>
             <a:pPr lvl="1"/>
@@ -371,7 +374,6 @@
               <a:rPr lang="zh-CN" altLang="en-US"/>
               <a:t>二级</a:t>
             </a:r>
-            <a:endParaRPr lang="zh-CN" altLang="en-US"/>
           </a:p>
           <a:p>
             <a:pPr lvl="2"/>
@@ -379,7 +381,6 @@
               <a:rPr lang="zh-CN" altLang="en-US"/>
               <a:t>三级</a:t>
             </a:r>
-            <a:endParaRPr lang="zh-CN" altLang="en-US"/>
           </a:p>
           <a:p>
             <a:pPr lvl="3"/>
@@ -387,7 +388,6 @@
               <a:rPr lang="zh-CN" altLang="en-US"/>
               <a:t>四级</a:t>
             </a:r>
-            <a:endParaRPr lang="zh-CN" altLang="en-US"/>
           </a:p>
           <a:p>
             <a:pPr lvl="4"/>
@@ -395,7 +395,6 @@
               <a:rPr lang="zh-CN" altLang="en-US"/>
               <a:t>五级</a:t>
             </a:r>
-            <a:endParaRPr lang="zh-CN" altLang="en-US"/>
           </a:p>
         </p:txBody>
       </p:sp>
@@ -416,6 +415,7 @@
           <a:p>
             <a:fld id="{A117251D-157D-4A93-8860-3E51ED663E19}" type="datetimeFigureOut">
               <a:rPr lang="zh-CN" altLang="en-US" smtClean="0"/>
+              <a:t>2026/4/10</a:t>
             </a:fld>
             <a:endParaRPr lang="zh-CN" altLang="en-US"/>
           </a:p>
@@ -457,6 +457,7 @@
           <a:p>
             <a:fld id="{B2FC78E8-33C0-47C5-AF77-A559993EE5A7}" type="slidenum">
               <a:rPr lang="zh-CN" altLang="en-US" smtClean="0"/>
+              <a:t>‹#›</a:t>
             </a:fld>
             <a:endParaRPr lang="zh-CN" altLang="en-US"/>
           </a:p>
@@ -511,7 +512,6 @@
               <a:rPr lang="zh-CN" altLang="en-US"/>
               <a:t>单击此处编辑母版标题样式</a:t>
             </a:r>
-            <a:endParaRPr lang="zh-CN" altLang="en-US"/>
           </a:p>
         </p:txBody>
       </p:sp>
@@ -540,7 +540,6 @@
               <a:rPr lang="zh-CN" altLang="en-US"/>
               <a:t>单击此处编辑母版文本样式</a:t>
             </a:r>
-            <a:endParaRPr lang="zh-CN" altLang="en-US"/>
           </a:p>
           <a:p>
             <a:pPr lvl="1"/>
@@ -548,7 +547,6 @@
               <a:rPr lang="zh-CN" altLang="en-US"/>
               <a:t>二级</a:t>
             </a:r>
-            <a:endParaRPr lang="zh-CN" altLang="en-US"/>
           </a:p>
           <a:p>
             <a:pPr lvl="2"/>
@@ -556,7 +554,6 @@
               <a:rPr lang="zh-CN" altLang="en-US"/>
               <a:t>三级</a:t>
             </a:r>
-            <a:endParaRPr lang="zh-CN" altLang="en-US"/>
           </a:p>
           <a:p>
             <a:pPr lvl="3"/>
@@ -564,7 +561,6 @@
               <a:rPr lang="zh-CN" altLang="en-US"/>
               <a:t>四级</a:t>
             </a:r>
-            <a:endParaRPr lang="zh-CN" altLang="en-US"/>
           </a:p>
           <a:p>
             <a:pPr lvl="4"/>
@@ -572,7 +568,6 @@
               <a:rPr lang="zh-CN" altLang="en-US"/>
               <a:t>五级</a:t>
             </a:r>
-            <a:endParaRPr lang="zh-CN" altLang="en-US"/>
           </a:p>
         </p:txBody>
       </p:sp>
@@ -593,6 +588,7 @@
           <a:p>
             <a:fld id="{A117251D-157D-4A93-8860-3E51ED663E19}" type="datetimeFigureOut">
               <a:rPr lang="zh-CN" altLang="en-US" smtClean="0"/>
+              <a:t>2026/4/10</a:t>
             </a:fld>
             <a:endParaRPr lang="zh-CN" altLang="en-US"/>
           </a:p>
@@ -634,6 +630,7 @@
           <a:p>
             <a:fld id="{B2FC78E8-33C0-47C5-AF77-A559993EE5A7}" type="slidenum">
               <a:rPr lang="zh-CN" altLang="en-US" smtClean="0"/>
+              <a:t>‹#›</a:t>
             </a:fld>
             <a:endParaRPr lang="zh-CN" altLang="en-US"/>
           </a:p>
@@ -683,7 +680,6 @@
               <a:rPr lang="zh-CN" altLang="en-US"/>
               <a:t>单击此处编辑母版标题样式</a:t>
             </a:r>
-            <a:endParaRPr lang="zh-CN" altLang="en-US"/>
           </a:p>
         </p:txBody>
       </p:sp>
@@ -707,7 +703,6 @@
               <a:rPr lang="zh-CN" altLang="en-US"/>
               <a:t>单击此处编辑母版文本样式</a:t>
             </a:r>
-            <a:endParaRPr lang="zh-CN" altLang="en-US"/>
           </a:p>
           <a:p>
             <a:pPr lvl="1"/>
@@ -715,7 +710,6 @@
               <a:rPr lang="zh-CN" altLang="en-US"/>
               <a:t>二级</a:t>
             </a:r>
-            <a:endParaRPr lang="zh-CN" altLang="en-US"/>
           </a:p>
           <a:p>
             <a:pPr lvl="2"/>
@@ -723,7 +717,6 @@
               <a:rPr lang="zh-CN" altLang="en-US"/>
               <a:t>三级</a:t>
             </a:r>
-            <a:endParaRPr lang="zh-CN" altLang="en-US"/>
           </a:p>
           <a:p>
             <a:pPr lvl="3"/>
@@ -731,7 +724,6 @@
               <a:rPr lang="zh-CN" altLang="en-US"/>
               <a:t>四级</a:t>
             </a:r>
-            <a:endParaRPr lang="zh-CN" altLang="en-US"/>
           </a:p>
           <a:p>
             <a:pPr lvl="4"/>
@@ -739,7 +731,6 @@
               <a:rPr lang="zh-CN" altLang="en-US"/>
               <a:t>五级</a:t>
             </a:r>
-            <a:endParaRPr lang="zh-CN" altLang="en-US"/>
           </a:p>
         </p:txBody>
       </p:sp>
@@ -760,6 +751,7 @@
           <a:p>
             <a:fld id="{A117251D-157D-4A93-8860-3E51ED663E19}" type="datetimeFigureOut">
               <a:rPr lang="zh-CN" altLang="en-US" smtClean="0"/>
+              <a:t>2026/4/10</a:t>
             </a:fld>
             <a:endParaRPr lang="zh-CN" altLang="en-US"/>
           </a:p>
@@ -801,6 +793,7 @@
           <a:p>
             <a:fld id="{B2FC78E8-33C0-47C5-AF77-A559993EE5A7}" type="slidenum">
               <a:rPr lang="zh-CN" altLang="en-US" smtClean="0"/>
+              <a:t>‹#›</a:t>
             </a:fld>
             <a:endParaRPr lang="zh-CN" altLang="en-US"/>
           </a:p>
@@ -859,7 +852,6 @@
               <a:rPr lang="zh-CN" altLang="en-US"/>
               <a:t>单击此处编辑母版标题样式</a:t>
             </a:r>
-            <a:endParaRPr lang="zh-CN" altLang="en-US"/>
           </a:p>
         </p:txBody>
       </p:sp>
@@ -979,7 +971,6 @@
               <a:rPr lang="zh-CN" altLang="en-US"/>
               <a:t>单击此处编辑母版文本样式</a:t>
             </a:r>
-            <a:endParaRPr lang="zh-CN" altLang="en-US"/>
           </a:p>
         </p:txBody>
       </p:sp>
@@ -1000,6 +991,7 @@
           <a:p>
             <a:fld id="{A117251D-157D-4A93-8860-3E51ED663E19}" type="datetimeFigureOut">
               <a:rPr lang="zh-CN" altLang="en-US" smtClean="0"/>
+              <a:t>2026/4/10</a:t>
             </a:fld>
             <a:endParaRPr lang="zh-CN" altLang="en-US"/>
           </a:p>
@@ -1041,6 +1033,7 @@
           <a:p>
             <a:fld id="{B2FC78E8-33C0-47C5-AF77-A559993EE5A7}" type="slidenum">
               <a:rPr lang="zh-CN" altLang="en-US" smtClean="0"/>
+              <a:t>‹#›</a:t>
             </a:fld>
             <a:endParaRPr lang="zh-CN" altLang="en-US"/>
           </a:p>
@@ -1090,7 +1083,6 @@
               <a:rPr lang="zh-CN" altLang="en-US"/>
               <a:t>单击此处编辑母版标题样式</a:t>
             </a:r>
-            <a:endParaRPr lang="zh-CN" altLang="en-US"/>
           </a:p>
         </p:txBody>
       </p:sp>
@@ -1119,7 +1111,6 @@
               <a:rPr lang="zh-CN" altLang="en-US"/>
               <a:t>单击此处编辑母版文本样式</a:t>
             </a:r>
-            <a:endParaRPr lang="zh-CN" altLang="en-US"/>
           </a:p>
           <a:p>
             <a:pPr lvl="1"/>
@@ -1127,7 +1118,6 @@
               <a:rPr lang="zh-CN" altLang="en-US"/>
               <a:t>二级</a:t>
             </a:r>
-            <a:endParaRPr lang="zh-CN" altLang="en-US"/>
           </a:p>
           <a:p>
             <a:pPr lvl="2"/>
@@ -1135,7 +1125,6 @@
               <a:rPr lang="zh-CN" altLang="en-US"/>
               <a:t>三级</a:t>
             </a:r>
-            <a:endParaRPr lang="zh-CN" altLang="en-US"/>
           </a:p>
           <a:p>
             <a:pPr lvl="3"/>
@@ -1143,7 +1132,6 @@
               <a:rPr lang="zh-CN" altLang="en-US"/>
               <a:t>四级</a:t>
             </a:r>
-            <a:endParaRPr lang="zh-CN" altLang="en-US"/>
           </a:p>
           <a:p>
             <a:pPr lvl="4"/>
@@ -1151,7 +1139,6 @@
               <a:rPr lang="zh-CN" altLang="en-US"/>
               <a:t>五级</a:t>
             </a:r>
-            <a:endParaRPr lang="zh-CN" altLang="en-US"/>
           </a:p>
         </p:txBody>
       </p:sp>
@@ -1180,7 +1167,6 @@
               <a:rPr lang="zh-CN" altLang="en-US"/>
               <a:t>单击此处编辑母版文本样式</a:t>
             </a:r>
-            <a:endParaRPr lang="zh-CN" altLang="en-US"/>
           </a:p>
           <a:p>
             <a:pPr lvl="1"/>
@@ -1188,7 +1174,6 @@
               <a:rPr lang="zh-CN" altLang="en-US"/>
               <a:t>二级</a:t>
             </a:r>
-            <a:endParaRPr lang="zh-CN" altLang="en-US"/>
           </a:p>
           <a:p>
             <a:pPr lvl="2"/>
@@ -1196,7 +1181,6 @@
               <a:rPr lang="zh-CN" altLang="en-US"/>
               <a:t>三级</a:t>
             </a:r>
-            <a:endParaRPr lang="zh-CN" altLang="en-US"/>
           </a:p>
           <a:p>
             <a:pPr lvl="3"/>
@@ -1204,7 +1188,6 @@
               <a:rPr lang="zh-CN" altLang="en-US"/>
               <a:t>四级</a:t>
             </a:r>
-            <a:endParaRPr lang="zh-CN" altLang="en-US"/>
           </a:p>
           <a:p>
             <a:pPr lvl="4"/>
@@ -1212,7 +1195,6 @@
               <a:rPr lang="zh-CN" altLang="en-US"/>
               <a:t>五级</a:t>
             </a:r>
-            <a:endParaRPr lang="zh-CN" altLang="en-US"/>
           </a:p>
         </p:txBody>
       </p:sp>
@@ -1233,6 +1215,7 @@
           <a:p>
             <a:fld id="{A117251D-157D-4A93-8860-3E51ED663E19}" type="datetimeFigureOut">
               <a:rPr lang="zh-CN" altLang="en-US" smtClean="0"/>
+              <a:t>2026/4/10</a:t>
             </a:fld>
             <a:endParaRPr lang="zh-CN" altLang="en-US"/>
           </a:p>
@@ -1274,6 +1257,7 @@
           <a:p>
             <a:fld id="{B2FC78E8-33C0-47C5-AF77-A559993EE5A7}" type="slidenum">
               <a:rPr lang="zh-CN" altLang="en-US" smtClean="0"/>
+              <a:t>‹#›</a:t>
             </a:fld>
             <a:endParaRPr lang="zh-CN" altLang="en-US"/>
           </a:p>
@@ -1328,7 +1312,6 @@
               <a:rPr lang="zh-CN" altLang="en-US"/>
               <a:t>单击此处编辑母版标题样式</a:t>
             </a:r>
-            <a:endParaRPr lang="zh-CN" altLang="en-US"/>
           </a:p>
         </p:txBody>
       </p:sp>
@@ -1394,7 +1377,6 @@
               <a:rPr lang="zh-CN" altLang="en-US"/>
               <a:t>单击此处编辑母版文本样式</a:t>
             </a:r>
-            <a:endParaRPr lang="zh-CN" altLang="en-US"/>
           </a:p>
         </p:txBody>
       </p:sp>
@@ -1423,7 +1405,6 @@
               <a:rPr lang="zh-CN" altLang="en-US"/>
               <a:t>单击此处编辑母版文本样式</a:t>
             </a:r>
-            <a:endParaRPr lang="zh-CN" altLang="en-US"/>
           </a:p>
           <a:p>
             <a:pPr lvl="1"/>
@@ -1431,7 +1412,6 @@
               <a:rPr lang="zh-CN" altLang="en-US"/>
               <a:t>二级</a:t>
             </a:r>
-            <a:endParaRPr lang="zh-CN" altLang="en-US"/>
           </a:p>
           <a:p>
             <a:pPr lvl="2"/>
@@ -1439,7 +1419,6 @@
               <a:rPr lang="zh-CN" altLang="en-US"/>
               <a:t>三级</a:t>
             </a:r>
-            <a:endParaRPr lang="zh-CN" altLang="en-US"/>
           </a:p>
           <a:p>
             <a:pPr lvl="3"/>
@@ -1447,7 +1426,6 @@
               <a:rPr lang="zh-CN" altLang="en-US"/>
               <a:t>四级</a:t>
             </a:r>
-            <a:endParaRPr lang="zh-CN" altLang="en-US"/>
           </a:p>
           <a:p>
             <a:pPr lvl="4"/>
@@ -1455,7 +1433,6 @@
               <a:rPr lang="zh-CN" altLang="en-US"/>
               <a:t>五级</a:t>
             </a:r>
-            <a:endParaRPr lang="zh-CN" altLang="en-US"/>
           </a:p>
         </p:txBody>
       </p:sp>
@@ -1521,7 +1498,6 @@
               <a:rPr lang="zh-CN" altLang="en-US"/>
               <a:t>单击此处编辑母版文本样式</a:t>
             </a:r>
-            <a:endParaRPr lang="zh-CN" altLang="en-US"/>
           </a:p>
         </p:txBody>
       </p:sp>
@@ -1550,7 +1526,6 @@
               <a:rPr lang="zh-CN" altLang="en-US"/>
               <a:t>单击此处编辑母版文本样式</a:t>
             </a:r>
-            <a:endParaRPr lang="zh-CN" altLang="en-US"/>
           </a:p>
           <a:p>
             <a:pPr lvl="1"/>
@@ -1558,7 +1533,6 @@
               <a:rPr lang="zh-CN" altLang="en-US"/>
               <a:t>二级</a:t>
             </a:r>
-            <a:endParaRPr lang="zh-CN" altLang="en-US"/>
           </a:p>
           <a:p>
             <a:pPr lvl="2"/>
@@ -1566,7 +1540,6 @@
               <a:rPr lang="zh-CN" altLang="en-US"/>
               <a:t>三级</a:t>
             </a:r>
-            <a:endParaRPr lang="zh-CN" altLang="en-US"/>
           </a:p>
           <a:p>
             <a:pPr lvl="3"/>
@@ -1574,7 +1547,6 @@
               <a:rPr lang="zh-CN" altLang="en-US"/>
               <a:t>四级</a:t>
             </a:r>
-            <a:endParaRPr lang="zh-CN" altLang="en-US"/>
           </a:p>
           <a:p>
             <a:pPr lvl="4"/>
@@ -1582,7 +1554,6 @@
               <a:rPr lang="zh-CN" altLang="en-US"/>
               <a:t>五级</a:t>
             </a:r>
-            <a:endParaRPr lang="zh-CN" altLang="en-US"/>
           </a:p>
         </p:txBody>
       </p:sp>
@@ -1603,6 +1574,7 @@
           <a:p>
             <a:fld id="{A117251D-157D-4A93-8860-3E51ED663E19}" type="datetimeFigureOut">
               <a:rPr lang="zh-CN" altLang="en-US" smtClean="0"/>
+              <a:t>2026/4/10</a:t>
             </a:fld>
             <a:endParaRPr lang="zh-CN" altLang="en-US"/>
           </a:p>
@@ -1644,6 +1616,7 @@
           <a:p>
             <a:fld id="{B2FC78E8-33C0-47C5-AF77-A559993EE5A7}" type="slidenum">
               <a:rPr lang="zh-CN" altLang="en-US" smtClean="0"/>
+              <a:t>‹#›</a:t>
             </a:fld>
             <a:endParaRPr lang="zh-CN" altLang="en-US"/>
           </a:p>
@@ -1693,7 +1666,6 @@
               <a:rPr lang="zh-CN" altLang="en-US"/>
               <a:t>单击此处编辑母版标题样式</a:t>
             </a:r>
-            <a:endParaRPr lang="zh-CN" altLang="en-US"/>
           </a:p>
         </p:txBody>
       </p:sp>
@@ -1714,6 +1686,7 @@
           <a:p>
             <a:fld id="{A117251D-157D-4A93-8860-3E51ED663E19}" type="datetimeFigureOut">
               <a:rPr lang="zh-CN" altLang="en-US" smtClean="0"/>
+              <a:t>2026/4/10</a:t>
             </a:fld>
             <a:endParaRPr lang="zh-CN" altLang="en-US"/>
           </a:p>
@@ -1755,6 +1728,7 @@
           <a:p>
             <a:fld id="{B2FC78E8-33C0-47C5-AF77-A559993EE5A7}" type="slidenum">
               <a:rPr lang="zh-CN" altLang="en-US" smtClean="0"/>
+              <a:t>‹#›</a:t>
             </a:fld>
             <a:endParaRPr lang="zh-CN" altLang="en-US"/>
           </a:p>
@@ -1802,6 +1776,7 @@
           <a:p>
             <a:fld id="{A117251D-157D-4A93-8860-3E51ED663E19}" type="datetimeFigureOut">
               <a:rPr lang="zh-CN" altLang="en-US" smtClean="0"/>
+              <a:t>2026/4/10</a:t>
             </a:fld>
             <a:endParaRPr lang="zh-CN" altLang="en-US"/>
           </a:p>
@@ -1843,6 +1818,7 @@
           <a:p>
             <a:fld id="{B2FC78E8-33C0-47C5-AF77-A559993EE5A7}" type="slidenum">
               <a:rPr lang="zh-CN" altLang="en-US" smtClean="0"/>
+              <a:t>‹#›</a:t>
             </a:fld>
             <a:endParaRPr lang="zh-CN" altLang="en-US"/>
           </a:p>
@@ -1901,7 +1877,6 @@
               <a:rPr lang="zh-CN" altLang="en-US"/>
               <a:t>单击此处编辑母版标题样式</a:t>
             </a:r>
-            <a:endParaRPr lang="zh-CN" altLang="en-US"/>
           </a:p>
         </p:txBody>
       </p:sp>
@@ -1958,7 +1933,6 @@
               <a:rPr lang="zh-CN" altLang="en-US"/>
               <a:t>单击此处编辑母版文本样式</a:t>
             </a:r>
-            <a:endParaRPr lang="zh-CN" altLang="en-US"/>
           </a:p>
           <a:p>
             <a:pPr lvl="1"/>
@@ -1966,7 +1940,6 @@
               <a:rPr lang="zh-CN" altLang="en-US"/>
               <a:t>二级</a:t>
             </a:r>
-            <a:endParaRPr lang="zh-CN" altLang="en-US"/>
           </a:p>
           <a:p>
             <a:pPr lvl="2"/>
@@ -1974,7 +1947,6 @@
               <a:rPr lang="zh-CN" altLang="en-US"/>
               <a:t>三级</a:t>
             </a:r>
-            <a:endParaRPr lang="zh-CN" altLang="en-US"/>
           </a:p>
           <a:p>
             <a:pPr lvl="3"/>
@@ -1982,7 +1954,6 @@
               <a:rPr lang="zh-CN" altLang="en-US"/>
               <a:t>四级</a:t>
             </a:r>
-            <a:endParaRPr lang="zh-CN" altLang="en-US"/>
           </a:p>
           <a:p>
             <a:pPr lvl="4"/>
@@ -1990,7 +1961,6 @@
               <a:rPr lang="zh-CN" altLang="en-US"/>
               <a:t>五级</a:t>
             </a:r>
-            <a:endParaRPr lang="zh-CN" altLang="en-US"/>
           </a:p>
         </p:txBody>
       </p:sp>
@@ -2056,7 +2026,6 @@
               <a:rPr lang="zh-CN" altLang="en-US"/>
               <a:t>单击此处编辑母版文本样式</a:t>
             </a:r>
-            <a:endParaRPr lang="zh-CN" altLang="en-US"/>
           </a:p>
         </p:txBody>
       </p:sp>
@@ -2077,6 +2046,7 @@
           <a:p>
             <a:fld id="{A117251D-157D-4A93-8860-3E51ED663E19}" type="datetimeFigureOut">
               <a:rPr lang="zh-CN" altLang="en-US" smtClean="0"/>
+              <a:t>2026/4/10</a:t>
             </a:fld>
             <a:endParaRPr lang="zh-CN" altLang="en-US"/>
           </a:p>
@@ -2118,6 +2088,7 @@
           <a:p>
             <a:fld id="{B2FC78E8-33C0-47C5-AF77-A559993EE5A7}" type="slidenum">
               <a:rPr lang="zh-CN" altLang="en-US" smtClean="0"/>
+              <a:t>‹#›</a:t>
             </a:fld>
             <a:endParaRPr lang="zh-CN" altLang="en-US"/>
           </a:p>
@@ -2176,7 +2147,6 @@
               <a:rPr lang="zh-CN" altLang="en-US"/>
               <a:t>单击此处编辑母版标题样式</a:t>
             </a:r>
-            <a:endParaRPr lang="zh-CN" altLang="en-US"/>
           </a:p>
         </p:txBody>
       </p:sp>
@@ -2303,7 +2273,6 @@
               <a:rPr lang="zh-CN" altLang="en-US"/>
               <a:t>单击此处编辑母版文本样式</a:t>
             </a:r>
-            <a:endParaRPr lang="zh-CN" altLang="en-US"/>
           </a:p>
         </p:txBody>
       </p:sp>
@@ -2324,6 +2293,7 @@
           <a:p>
             <a:fld id="{A117251D-157D-4A93-8860-3E51ED663E19}" type="datetimeFigureOut">
               <a:rPr lang="zh-CN" altLang="en-US" smtClean="0"/>
+              <a:t>2026/4/10</a:t>
             </a:fld>
             <a:endParaRPr lang="zh-CN" altLang="en-US"/>
           </a:p>
@@ -2365,6 +2335,7 @@
           <a:p>
             <a:fld id="{B2FC78E8-33C0-47C5-AF77-A559993EE5A7}" type="slidenum">
               <a:rPr lang="zh-CN" altLang="en-US" smtClean="0"/>
+              <a:t>‹#›</a:t>
             </a:fld>
             <a:endParaRPr lang="zh-CN" altLang="en-US"/>
           </a:p>
@@ -2429,7 +2400,6 @@
               <a:rPr lang="zh-CN" altLang="en-US"/>
               <a:t>单击此处编辑母版标题样式</a:t>
             </a:r>
-            <a:endParaRPr lang="zh-CN" altLang="en-US"/>
           </a:p>
         </p:txBody>
       </p:sp>
@@ -2463,7 +2433,6 @@
               <a:rPr lang="zh-CN" altLang="en-US"/>
               <a:t>单击此处编辑母版文本样式</a:t>
             </a:r>
-            <a:endParaRPr lang="zh-CN" altLang="en-US"/>
           </a:p>
           <a:p>
             <a:pPr lvl="1"/>
@@ -2471,7 +2440,6 @@
               <a:rPr lang="zh-CN" altLang="en-US"/>
               <a:t>二级</a:t>
             </a:r>
-            <a:endParaRPr lang="zh-CN" altLang="en-US"/>
           </a:p>
           <a:p>
             <a:pPr lvl="2"/>
@@ -2479,7 +2447,6 @@
               <a:rPr lang="zh-CN" altLang="en-US"/>
               <a:t>三级</a:t>
             </a:r>
-            <a:endParaRPr lang="zh-CN" altLang="en-US"/>
           </a:p>
           <a:p>
             <a:pPr lvl="3"/>
@@ -2487,7 +2454,6 @@
               <a:rPr lang="zh-CN" altLang="en-US"/>
               <a:t>四级</a:t>
             </a:r>
-            <a:endParaRPr lang="zh-CN" altLang="en-US"/>
           </a:p>
           <a:p>
             <a:pPr lvl="4"/>
@@ -2495,7 +2461,6 @@
               <a:rPr lang="zh-CN" altLang="en-US"/>
               <a:t>五级</a:t>
             </a:r>
-            <a:endParaRPr lang="zh-CN" altLang="en-US"/>
           </a:p>
         </p:txBody>
       </p:sp>
@@ -2534,6 +2499,7 @@
           <a:p>
             <a:fld id="{A117251D-157D-4A93-8860-3E51ED663E19}" type="datetimeFigureOut">
               <a:rPr lang="zh-CN" altLang="en-US" smtClean="0"/>
+              <a:t>2026/4/10</a:t>
             </a:fld>
             <a:endParaRPr lang="zh-CN" altLang="en-US"/>
           </a:p>
@@ -2611,6 +2577,7 @@
           <a:p>
             <a:fld id="{B2FC78E8-33C0-47C5-AF77-A559993EE5A7}" type="slidenum">
               <a:rPr lang="zh-CN" altLang="en-US" smtClean="0"/>
+              <a:t>‹#›</a:t>
             </a:fld>
             <a:endParaRPr lang="zh-CN" altLang="en-US"/>
           </a:p>
@@ -3100,12 +3067,6 @@
               </a:rPr>
               <a:t>：基于视觉感知局限的可视化对比改进</a:t>
             </a:r>
-            <a:endParaRPr lang="zh-CN" altLang="en-US" sz="3300" b="1">
-              <a:solidFill>
-                <a:srgbClr val="563B18"/>
-              </a:solidFill>
-              <a:latin typeface="微软雅黑" panose="020B0503020204020204" pitchFamily="34" charset="-122"/>
-            </a:endParaRPr>
           </a:p>
         </p:txBody>
       </p:sp>
@@ -3149,12 +3110,6 @@
               </a:rPr>
               <a:t>Contrast Sensitivity &amp; Optics</a:t>
             </a:r>
-            <a:endParaRPr lang="en-US" altLang="zh-CN" sz="2000">
-              <a:solidFill>
-                <a:srgbClr val="675447"/>
-              </a:solidFill>
-              <a:latin typeface="微软雅黑" panose="020B0503020204020204" pitchFamily="34" charset="-122"/>
-            </a:endParaRPr>
           </a:p>
         </p:txBody>
       </p:sp>
@@ -3167,7 +3122,7 @@
         <p:spPr>
           <a:xfrm>
             <a:off x="1117600" y="3354705"/>
-            <a:ext cx="4572000" cy="398780"/>
+            <a:ext cx="4978400" cy="1015663"/>
           </a:xfrm>
           <a:prstGeom prst="rect">
             <a:avLst/>
@@ -3181,20 +3136,93 @@
           <a:lstStyle/>
           <a:p>
             <a:r>
-              <a:rPr lang="zh-CN" altLang="en-US" sz="2000" b="1">
+              <a:rPr lang="zh-CN" altLang="en-US" sz="2000" b="1" dirty="0">
                 <a:solidFill>
                   <a:srgbClr val="764A2D"/>
                 </a:solidFill>
                 <a:latin typeface="微软雅黑" panose="020B0503020204020204" pitchFamily="34" charset="-122"/>
               </a:rPr>
-              <a:t>成员分工：</a:t>
-            </a:r>
-            <a:endParaRPr lang="zh-CN" altLang="en-US" sz="2000" b="1">
+              <a:t>成员分工：何键韬 </a:t>
+            </a:r>
+            <a:r>
+              <a:rPr lang="zh-CN" altLang="en-US" sz="2000" dirty="0">
+                <a:solidFill>
+                  <a:srgbClr val="764A2D"/>
+                </a:solidFill>
+                <a:latin typeface="微软雅黑" panose="020B0503020204020204" pitchFamily="34" charset="-122"/>
+              </a:rPr>
+              <a:t>数据收集、可视实现</a:t>
+            </a:r>
+            <a:endParaRPr lang="en-US" altLang="zh-CN" sz="2000" dirty="0">
               <a:solidFill>
                 <a:srgbClr val="764A2D"/>
               </a:solidFill>
               <a:latin typeface="微软雅黑" panose="020B0503020204020204" pitchFamily="34" charset="-122"/>
             </a:endParaRPr>
+          </a:p>
+          <a:p>
+            <a:r>
+              <a:rPr lang="en-US" altLang="zh-CN" sz="2000" b="1" dirty="0">
+                <a:solidFill>
+                  <a:srgbClr val="764A2D"/>
+                </a:solidFill>
+                <a:latin typeface="微软雅黑" panose="020B0503020204020204" pitchFamily="34" charset="-122"/>
+              </a:rPr>
+              <a:t>	     </a:t>
+            </a:r>
+            <a:r>
+              <a:rPr lang="zh-CN" altLang="en-US" sz="2000" b="1" dirty="0">
+                <a:solidFill>
+                  <a:srgbClr val="764A2D"/>
+                </a:solidFill>
+                <a:latin typeface="微软雅黑" panose="020B0503020204020204" pitchFamily="34" charset="-122"/>
+              </a:rPr>
+              <a:t>郑逸驰 </a:t>
+            </a:r>
+            <a:r>
+              <a:rPr lang="zh-CN" altLang="en-US" sz="2000" dirty="0">
+                <a:solidFill>
+                  <a:srgbClr val="764A2D"/>
+                </a:solidFill>
+                <a:latin typeface="微软雅黑" panose="020B0503020204020204" pitchFamily="34" charset="-122"/>
+              </a:rPr>
+              <a:t>报告撰写</a:t>
+            </a:r>
+            <a:endParaRPr lang="en-US" altLang="zh-CN" sz="2000" dirty="0">
+              <a:solidFill>
+                <a:srgbClr val="764A2D"/>
+              </a:solidFill>
+              <a:latin typeface="微软雅黑" panose="020B0503020204020204" pitchFamily="34" charset="-122"/>
+            </a:endParaRPr>
+          </a:p>
+          <a:p>
+            <a:r>
+              <a:rPr lang="en-US" altLang="zh-CN" sz="2000" dirty="0">
+                <a:solidFill>
+                  <a:srgbClr val="764A2D"/>
+                </a:solidFill>
+                <a:latin typeface="微软雅黑" panose="020B0503020204020204" pitchFamily="34" charset="-122"/>
+              </a:rPr>
+              <a:t>	     </a:t>
+            </a:r>
+            <a:r>
+              <a:rPr lang="zh-CN" altLang="en-US" sz="2000" b="1" dirty="0">
+                <a:solidFill>
+                  <a:srgbClr val="764A2D"/>
+                </a:solidFill>
+                <a:latin typeface="微软雅黑" panose="020B0503020204020204" pitchFamily="34" charset="-122"/>
+              </a:rPr>
+              <a:t>孙海骏</a:t>
+            </a:r>
+            <a:r>
+              <a:rPr lang="zh-CN" altLang="en-US" sz="2000" dirty="0">
+                <a:solidFill>
+                  <a:srgbClr val="764A2D"/>
+                </a:solidFill>
+                <a:latin typeface="微软雅黑" panose="020B0503020204020204" pitchFamily="34" charset="-122"/>
+              </a:rPr>
+              <a:t> 可视实现、汇报</a:t>
+            </a:r>
           </a:p>
         </p:txBody>
       </p:sp>
@@ -3469,12 +3497,6 @@
               </a:rPr>
               <a:t>其余分类快照</a:t>
             </a:r>
-            <a:endParaRPr lang="zh-CN" altLang="en-US" sz="2800" b="1">
-              <a:solidFill>
-                <a:srgbClr val="563B18"/>
-              </a:solidFill>
-              <a:latin typeface="微软雅黑" panose="020B0503020204020204" pitchFamily="34" charset="-122"/>
-            </a:endParaRPr>
           </a:p>
         </p:txBody>
       </p:sp>
@@ -3606,7 +3628,7 @@
           <p:nvPr/>
         </p:nvPicPr>
         <p:blipFill>
-          <a:blip r:embed="rId1"/>
+          <a:blip r:embed="rId2"/>
           <a:stretch>
             <a:fillRect/>
           </a:stretch>
@@ -3630,7 +3652,7 @@
           <p:nvPr/>
         </p:nvPicPr>
         <p:blipFill>
-          <a:blip r:embed="rId2"/>
+          <a:blip r:embed="rId3"/>
           <a:stretch>
             <a:fillRect/>
           </a:stretch>
@@ -3654,7 +3676,7 @@
           <p:nvPr/>
         </p:nvPicPr>
         <p:blipFill>
-          <a:blip r:embed="rId3"/>
+          <a:blip r:embed="rId4"/>
           <a:stretch>
             <a:fillRect/>
           </a:stretch>
@@ -3880,12 +3902,6 @@
               </a:rPr>
               <a:t>改进图对比</a:t>
             </a:r>
-            <a:endParaRPr lang="zh-CN" altLang="en-US" sz="2800" b="1">
-              <a:solidFill>
-                <a:srgbClr val="563B18"/>
-              </a:solidFill>
-              <a:latin typeface="微软雅黑" panose="020B0503020204020204" pitchFamily="34" charset="-122"/>
-            </a:endParaRPr>
           </a:p>
         </p:txBody>
       </p:sp>
@@ -3949,9 +3965,27 @@
                 <a:tableStyleId>{5C22544A-7EE6-4342-B048-85BDC9FD1C3A}</a:tableStyleId>
               </a:tblPr>
               <a:tblGrid>
-                <a:gridCol w="3589867"/>
-                <a:gridCol w="3589867"/>
-                <a:gridCol w="3589867"/>
+                <a:gridCol w="3589867">
+                  <a:extLst>
+                    <a:ext uri="{9D8B030D-6E8A-4147-A177-3AD203B41FA5}">
+                      <a16:colId xmlns:a16="http://schemas.microsoft.com/office/drawing/2014/main" val="20000"/>
+                    </a:ext>
+                  </a:extLst>
+                </a:gridCol>
+                <a:gridCol w="3589867">
+                  <a:extLst>
+                    <a:ext uri="{9D8B030D-6E8A-4147-A177-3AD203B41FA5}">
+                      <a16:colId xmlns:a16="http://schemas.microsoft.com/office/drawing/2014/main" val="20001"/>
+                    </a:ext>
+                  </a:extLst>
+                </a:gridCol>
+                <a:gridCol w="3589867">
+                  <a:extLst>
+                    <a:ext uri="{9D8B030D-6E8A-4147-A177-3AD203B41FA5}">
+                      <a16:colId xmlns:a16="http://schemas.microsoft.com/office/drawing/2014/main" val="20002"/>
+                    </a:ext>
+                  </a:extLst>
+                </a:gridCol>
               </a:tblGrid>
               <a:tr h="741680">
                 <a:tc>
@@ -3968,12 +4002,6 @@
                         </a:rPr>
                         <a:t>对比维度</a:t>
                       </a:r>
-                      <a:endParaRPr lang="zh-CN" altLang="en-US" sz="1800" b="1">
-                        <a:solidFill>
-                          <a:schemeClr val="tx1"/>
-                        </a:solidFill>
-                        <a:latin typeface="微软雅黑" panose="020B0503020204020204" pitchFamily="34" charset="-122"/>
-                      </a:endParaRPr>
                     </a:p>
                   </a:txBody>
                   <a:tcPr>
@@ -3996,12 +4024,6 @@
                         </a:rPr>
                         <a:t>原图表现</a:t>
                       </a:r>
-                      <a:endParaRPr lang="zh-CN" altLang="en-US" sz="1800" b="1">
-                        <a:solidFill>
-                          <a:schemeClr val="tx1"/>
-                        </a:solidFill>
-                        <a:latin typeface="微软雅黑" panose="020B0503020204020204" pitchFamily="34" charset="-122"/>
-                      </a:endParaRPr>
                     </a:p>
                   </a:txBody>
                   <a:tcPr>
@@ -4024,12 +4046,6 @@
                         </a:rPr>
                         <a:t>改进表现</a:t>
                       </a:r>
-                      <a:endParaRPr lang="zh-CN" altLang="en-US" sz="1800" b="1">
-                        <a:solidFill>
-                          <a:schemeClr val="tx1"/>
-                        </a:solidFill>
-                        <a:latin typeface="微软雅黑" panose="020B0503020204020204" pitchFamily="34" charset="-122"/>
-                      </a:endParaRPr>
                     </a:p>
                   </a:txBody>
                   <a:tcPr>
@@ -4038,6 +4054,11 @@
                     </a:solidFill>
                   </a:tcPr>
                 </a:tc>
+                <a:extLst>
+                  <a:ext uri="{0D108BD9-81ED-4DB2-BD59-A6C34878D82A}">
+                    <a16:rowId xmlns:a16="http://schemas.microsoft.com/office/drawing/2014/main" val="10000"/>
+                  </a:ext>
+                </a:extLst>
               </a:tr>
               <a:tr h="741680">
                 <a:tc>
@@ -4051,9 +4072,6 @@
                         </a:rPr>
                         <a:t>视觉入口</a:t>
                       </a:r>
-                      <a:endParaRPr lang="zh-CN" altLang="en-US" sz="1600">
-                        <a:latin typeface="微软雅黑" panose="020B0503020204020204" pitchFamily="34" charset="-122"/>
-                      </a:endParaRPr>
                     </a:p>
                   </a:txBody>
                   <a:tcPr>
@@ -4073,9 +4091,6 @@
                         </a:rPr>
                         <a:t>多元素竞争</a:t>
                       </a:r>
-                      <a:endParaRPr lang="zh-CN" altLang="en-US" sz="1600">
-                        <a:latin typeface="微软雅黑" panose="020B0503020204020204" pitchFamily="34" charset="-122"/>
-                      </a:endParaRPr>
                     </a:p>
                   </a:txBody>
                   <a:tcPr>
@@ -4095,9 +4110,6 @@
                         </a:rPr>
                         <a:t>分区明确</a:t>
                       </a:r>
-                      <a:endParaRPr lang="zh-CN" altLang="en-US" sz="1600">
-                        <a:latin typeface="微软雅黑" panose="020B0503020204020204" pitchFamily="34" charset="-122"/>
-                      </a:endParaRPr>
                     </a:p>
                   </a:txBody>
                   <a:tcPr>
@@ -4106,6 +4118,11 @@
                     </a:solidFill>
                   </a:tcPr>
                 </a:tc>
+                <a:extLst>
+                  <a:ext uri="{0D108BD9-81ED-4DB2-BD59-A6C34878D82A}">
+                    <a16:rowId xmlns:a16="http://schemas.microsoft.com/office/drawing/2014/main" val="10001"/>
+                  </a:ext>
+                </a:extLst>
               </a:tr>
               <a:tr h="741680">
                 <a:tc>
@@ -4119,9 +4136,6 @@
                         </a:rPr>
                         <a:t>对比敏感度</a:t>
                       </a:r>
-                      <a:endParaRPr lang="zh-CN" altLang="en-US" sz="1600">
-                        <a:latin typeface="微软雅黑" panose="020B0503020204020204" pitchFamily="34" charset="-122"/>
-                      </a:endParaRPr>
                     </a:p>
                   </a:txBody>
                   <a:tcPr>
@@ -4141,9 +4155,6 @@
                         </a:rPr>
                         <a:t>低对比区难读</a:t>
                       </a:r>
-                      <a:endParaRPr lang="zh-CN" altLang="en-US" sz="1600">
-                        <a:latin typeface="微软雅黑" panose="020B0503020204020204" pitchFamily="34" charset="-122"/>
-                      </a:endParaRPr>
                     </a:p>
                   </a:txBody>
                   <a:tcPr>
@@ -4163,9 +4174,6 @@
                         </a:rPr>
                         <a:t>高对比易识别</a:t>
                       </a:r>
-                      <a:endParaRPr lang="zh-CN" altLang="en-US" sz="1600">
-                        <a:latin typeface="微软雅黑" panose="020B0503020204020204" pitchFamily="34" charset="-122"/>
-                      </a:endParaRPr>
                     </a:p>
                   </a:txBody>
                   <a:tcPr>
@@ -4174,6 +4182,11 @@
                     </a:solidFill>
                   </a:tcPr>
                 </a:tc>
+                <a:extLst>
+                  <a:ext uri="{0D108BD9-81ED-4DB2-BD59-A6C34878D82A}">
+                    <a16:rowId xmlns:a16="http://schemas.microsoft.com/office/drawing/2014/main" val="10002"/>
+                  </a:ext>
+                </a:extLst>
               </a:tr>
               <a:tr h="741680">
                 <a:tc>
@@ -4187,9 +4200,6 @@
                         </a:rPr>
                         <a:t>认知负担</a:t>
                       </a:r>
-                      <a:endParaRPr lang="zh-CN" altLang="en-US" sz="1600">
-                        <a:latin typeface="微软雅黑" panose="020B0503020204020204" pitchFamily="34" charset="-122"/>
-                      </a:endParaRPr>
                     </a:p>
                   </a:txBody>
                   <a:tcPr>
@@ -4209,9 +4219,6 @@
                         </a:rPr>
                         <a:t>一次处理对象过多</a:t>
                       </a:r>
-                      <a:endParaRPr lang="zh-CN" altLang="en-US" sz="1600">
-                        <a:latin typeface="微软雅黑" panose="020B0503020204020204" pitchFamily="34" charset="-122"/>
-                      </a:endParaRPr>
                     </a:p>
                   </a:txBody>
                   <a:tcPr>
@@ -4231,9 +4238,6 @@
                         </a:rPr>
                         <a:t>支持分层阅读</a:t>
                       </a:r>
-                      <a:endParaRPr lang="zh-CN" altLang="en-US" sz="1600">
-                        <a:latin typeface="微软雅黑" panose="020B0503020204020204" pitchFamily="34" charset="-122"/>
-                      </a:endParaRPr>
                     </a:p>
                   </a:txBody>
                   <a:tcPr>
@@ -4242,6 +4246,11 @@
                     </a:solidFill>
                   </a:tcPr>
                 </a:tc>
+                <a:extLst>
+                  <a:ext uri="{0D108BD9-81ED-4DB2-BD59-A6C34878D82A}">
+                    <a16:rowId xmlns:a16="http://schemas.microsoft.com/office/drawing/2014/main" val="10003"/>
+                  </a:ext>
+                </a:extLst>
               </a:tr>
               <a:tr h="741680">
                 <a:tc>
@@ -4255,9 +4264,6 @@
                         </a:rPr>
                         <a:t>信息效率</a:t>
                       </a:r>
-                      <a:endParaRPr lang="zh-CN" altLang="en-US" sz="1600">
-                        <a:latin typeface="微软雅黑" panose="020B0503020204020204" pitchFamily="34" charset="-122"/>
-                      </a:endParaRPr>
                     </a:p>
                   </a:txBody>
                   <a:tcPr>
@@ -4277,9 +4283,6 @@
                         </a:rPr>
                         <a:t>有信息但提取慢</a:t>
                       </a:r>
-                      <a:endParaRPr lang="zh-CN" altLang="en-US" sz="1600">
-                        <a:latin typeface="微软雅黑" panose="020B0503020204020204" pitchFamily="34" charset="-122"/>
-                      </a:endParaRPr>
                     </a:p>
                   </a:txBody>
                   <a:tcPr>
@@ -4299,9 +4302,6 @@
                         </a:rPr>
                         <a:t>信息完整且提取更快</a:t>
                       </a:r>
-                      <a:endParaRPr lang="zh-CN" altLang="en-US" sz="1600">
-                        <a:latin typeface="微软雅黑" panose="020B0503020204020204" pitchFamily="34" charset="-122"/>
-                      </a:endParaRPr>
                     </a:p>
                   </a:txBody>
                   <a:tcPr>
@@ -4310,6 +4310,11 @@
                     </a:solidFill>
                   </a:tcPr>
                 </a:tc>
+                <a:extLst>
+                  <a:ext uri="{0D108BD9-81ED-4DB2-BD59-A6C34878D82A}">
+                    <a16:rowId xmlns:a16="http://schemas.microsoft.com/office/drawing/2014/main" val="10004"/>
+                  </a:ext>
+                </a:extLst>
               </a:tr>
             </a:tbl>
           </a:graphicData>
@@ -4586,12 +4591,6 @@
               </a:rPr>
               <a:t>结论</a:t>
             </a:r>
-            <a:endParaRPr lang="zh-CN" altLang="en-US" sz="2800" b="1">
-              <a:solidFill>
-                <a:srgbClr val="563B18"/>
-              </a:solidFill>
-              <a:latin typeface="微软雅黑" panose="020B0503020204020204" pitchFamily="34" charset="-122"/>
-            </a:endParaRPr>
           </a:p>
         </p:txBody>
       </p:sp>
@@ -4674,12 +4673,6 @@
               </a:rPr>
               <a:t>可视化专业性在于传达效率，而非元素堆叠。</a:t>
             </a:r>
-            <a:endParaRPr lang="zh-CN" altLang="en-US" sz="2200">
-              <a:solidFill>
-                <a:srgbClr val="514137"/>
-              </a:solidFill>
-              <a:latin typeface="微软雅黑" panose="020B0503020204020204" pitchFamily="34" charset="-122"/>
-            </a:endParaRPr>
           </a:p>
           <a:p>
             <a:pPr marL="457200" indent="-457200">
@@ -4716,12 +4709,6 @@
               </a:rPr>
               <a:t>视觉光学限制。</a:t>
             </a:r>
-            <a:endParaRPr lang="zh-CN" altLang="en-US" sz="2200">
-              <a:solidFill>
-                <a:srgbClr val="514137"/>
-              </a:solidFill>
-              <a:latin typeface="微软雅黑" panose="020B0503020204020204" pitchFamily="34" charset="-122"/>
-            </a:endParaRPr>
           </a:p>
           <a:p>
             <a:pPr marL="457200" indent="-457200">
@@ -4740,12 +4727,6 @@
               </a:rPr>
               <a:t>改进图在读图效率和稳定性上更有优势。</a:t>
             </a:r>
-            <a:endParaRPr lang="zh-CN" altLang="en-US" sz="2200">
-              <a:solidFill>
-                <a:srgbClr val="514137"/>
-              </a:solidFill>
-              <a:latin typeface="微软雅黑" panose="020B0503020204020204" pitchFamily="34" charset="-122"/>
-            </a:endParaRPr>
           </a:p>
         </p:txBody>
       </p:sp>
@@ -4757,8 +4738,8 @@
         </p:nvSpPr>
         <p:spPr>
           <a:xfrm>
-            <a:off x="838200" y="4953000"/>
-            <a:ext cx="4064000" cy="398780"/>
+            <a:off x="838199" y="4953000"/>
+            <a:ext cx="4894943" cy="1015663"/>
           </a:xfrm>
           <a:prstGeom prst="rect">
             <a:avLst/>
@@ -4772,20 +4753,93 @@
           <a:lstStyle/>
           <a:p>
             <a:r>
-              <a:rPr lang="zh-CN" altLang="en-US" sz="2000" b="1">
-                <a:solidFill>
-                  <a:srgbClr val="675447"/>
-                </a:solidFill>
-                <a:latin typeface="微软雅黑" panose="020B0503020204020204" pitchFamily="34" charset="-122"/>
-              </a:rPr>
-              <a:t>成员分工：</a:t>
-            </a:r>
-            <a:endParaRPr lang="zh-CN" altLang="en-US" sz="2000" b="1">
+              <a:rPr lang="zh-CN" altLang="en-US" sz="2000" b="1" dirty="0">
+                <a:solidFill>
+                  <a:srgbClr val="764A2D"/>
+                </a:solidFill>
+                <a:latin typeface="微软雅黑" panose="020B0503020204020204" pitchFamily="34" charset="-122"/>
+              </a:rPr>
+              <a:t>成员分工：何键韬 </a:t>
+            </a:r>
+            <a:r>
+              <a:rPr lang="zh-CN" altLang="en-US" sz="2000" dirty="0">
+                <a:solidFill>
+                  <a:srgbClr val="764A2D"/>
+                </a:solidFill>
+                <a:latin typeface="微软雅黑" panose="020B0503020204020204" pitchFamily="34" charset="-122"/>
+              </a:rPr>
+              <a:t>数据收集、可视实现</a:t>
+            </a:r>
+            <a:endParaRPr lang="en-US" altLang="zh-CN" sz="2000" dirty="0">
               <a:solidFill>
-                <a:srgbClr val="675447"/>
+                <a:srgbClr val="764A2D"/>
               </a:solidFill>
               <a:latin typeface="微软雅黑" panose="020B0503020204020204" pitchFamily="34" charset="-122"/>
             </a:endParaRPr>
+          </a:p>
+          <a:p>
+            <a:r>
+              <a:rPr lang="en-US" altLang="zh-CN" sz="2000" b="1" dirty="0">
+                <a:solidFill>
+                  <a:srgbClr val="764A2D"/>
+                </a:solidFill>
+                <a:latin typeface="微软雅黑" panose="020B0503020204020204" pitchFamily="34" charset="-122"/>
+              </a:rPr>
+              <a:t>	     </a:t>
+            </a:r>
+            <a:r>
+              <a:rPr lang="zh-CN" altLang="en-US" sz="2000" b="1" dirty="0">
+                <a:solidFill>
+                  <a:srgbClr val="764A2D"/>
+                </a:solidFill>
+                <a:latin typeface="微软雅黑" panose="020B0503020204020204" pitchFamily="34" charset="-122"/>
+              </a:rPr>
+              <a:t>郑逸驰 </a:t>
+            </a:r>
+            <a:r>
+              <a:rPr lang="zh-CN" altLang="en-US" sz="2000" dirty="0">
+                <a:solidFill>
+                  <a:srgbClr val="764A2D"/>
+                </a:solidFill>
+                <a:latin typeface="微软雅黑" panose="020B0503020204020204" pitchFamily="34" charset="-122"/>
+              </a:rPr>
+              <a:t>报告撰写</a:t>
+            </a:r>
+            <a:endParaRPr lang="en-US" altLang="zh-CN" sz="2000" dirty="0">
+              <a:solidFill>
+                <a:srgbClr val="764A2D"/>
+              </a:solidFill>
+              <a:latin typeface="微软雅黑" panose="020B0503020204020204" pitchFamily="34" charset="-122"/>
+            </a:endParaRPr>
+          </a:p>
+          <a:p>
+            <a:r>
+              <a:rPr lang="en-US" altLang="zh-CN" sz="2000" dirty="0">
+                <a:solidFill>
+                  <a:srgbClr val="764A2D"/>
+                </a:solidFill>
+                <a:latin typeface="微软雅黑" panose="020B0503020204020204" pitchFamily="34" charset="-122"/>
+              </a:rPr>
+              <a:t>	     </a:t>
+            </a:r>
+            <a:r>
+              <a:rPr lang="zh-CN" altLang="en-US" sz="2000" b="1" dirty="0">
+                <a:solidFill>
+                  <a:srgbClr val="764A2D"/>
+                </a:solidFill>
+                <a:latin typeface="微软雅黑" panose="020B0503020204020204" pitchFamily="34" charset="-122"/>
+              </a:rPr>
+              <a:t>孙海骏</a:t>
+            </a:r>
+            <a:r>
+              <a:rPr lang="zh-CN" altLang="en-US" sz="2000" dirty="0">
+                <a:solidFill>
+                  <a:srgbClr val="764A2D"/>
+                </a:solidFill>
+                <a:latin typeface="微软雅黑" panose="020B0503020204020204" pitchFamily="34" charset="-122"/>
+              </a:rPr>
+              <a:t> 可视实现、汇报</a:t>
+            </a:r>
           </a:p>
         </p:txBody>
       </p:sp>
@@ -5060,12 +5114,6 @@
               </a:rPr>
               <a:t>作业要求与汇报目标</a:t>
             </a:r>
-            <a:endParaRPr lang="zh-CN" altLang="en-US" sz="2800" b="1">
-              <a:solidFill>
-                <a:srgbClr val="563B18"/>
-              </a:solidFill>
-              <a:latin typeface="微软雅黑" panose="020B0503020204020204" pitchFamily="34" charset="-122"/>
-            </a:endParaRPr>
           </a:p>
         </p:txBody>
       </p:sp>
@@ -5107,12 +5155,6 @@
               </a:rPr>
               <a:t>作业要求：展示误导性可视化，并给出同数据改进版。</a:t>
             </a:r>
-            <a:endParaRPr lang="zh-CN" altLang="en-US" sz="2100">
-              <a:solidFill>
-                <a:srgbClr val="514137"/>
-              </a:solidFill>
-              <a:latin typeface="微软雅黑" panose="020B0503020204020204" pitchFamily="34" charset="-122"/>
-            </a:endParaRPr>
           </a:p>
           <a:p>
             <a:pPr marL="457200" indent="-457200">
@@ -5131,12 +5173,6 @@
               </a:rPr>
               <a:t>理论依据：对比敏感度与视觉光学限制。</a:t>
             </a:r>
-            <a:endParaRPr lang="zh-CN" altLang="en-US" sz="2100">
-              <a:solidFill>
-                <a:srgbClr val="514137"/>
-              </a:solidFill>
-              <a:latin typeface="微软雅黑" panose="020B0503020204020204" pitchFamily="34" charset="-122"/>
-            </a:endParaRPr>
           </a:p>
           <a:p>
             <a:pPr marL="457200" indent="-457200">
@@ -5155,12 +5191,6 @@
               </a:rPr>
               <a:t>本汇报目标：解释误导机制与改进效果。</a:t>
             </a:r>
-            <a:endParaRPr lang="zh-CN" altLang="en-US" sz="2100">
-              <a:solidFill>
-                <a:srgbClr val="514137"/>
-              </a:solidFill>
-              <a:latin typeface="微软雅黑" panose="020B0503020204020204" pitchFamily="34" charset="-122"/>
-            </a:endParaRPr>
           </a:p>
           <a:p>
             <a:pPr marL="457200" indent="-457200">
@@ -5179,12 +5209,6 @@
               </a:rPr>
               <a:t>判断标准：观众能否更快更准地读图。</a:t>
             </a:r>
-            <a:endParaRPr lang="zh-CN" altLang="en-US" sz="2100">
-              <a:solidFill>
-                <a:srgbClr val="514137"/>
-              </a:solidFill>
-              <a:latin typeface="微软雅黑" panose="020B0503020204020204" pitchFamily="34" charset="-122"/>
-            </a:endParaRPr>
           </a:p>
         </p:txBody>
       </p:sp>
@@ -5242,12 +5266,6 @@
               </a:rPr>
               <a:t>作业说明占位（可选）</a:t>
             </a:r>
-            <a:endParaRPr lang="zh-CN" altLang="en-US" b="1">
-              <a:solidFill>
-                <a:srgbClr val="857066"/>
-              </a:solidFill>
-              <a:latin typeface="微软雅黑" panose="020B0503020204020204" pitchFamily="34" charset="-122"/>
-            </a:endParaRPr>
           </a:p>
           <a:p>
             <a:pPr algn="ctr"/>
@@ -5287,12 +5305,6 @@
               </a:rPr>
               <a:t>要点截图</a:t>
             </a:r>
-            <a:endParaRPr lang="zh-CN" altLang="en-US" b="1">
-              <a:solidFill>
-                <a:srgbClr val="857066"/>
-              </a:solidFill>
-              <a:latin typeface="微软雅黑" panose="020B0503020204020204" pitchFamily="34" charset="-122"/>
-            </a:endParaRPr>
           </a:p>
         </p:txBody>
       </p:sp>
@@ -5383,7 +5395,7 @@
           <p:nvPr/>
         </p:nvPicPr>
         <p:blipFill>
-          <a:blip r:embed="rId1"/>
+          <a:blip r:embed="rId2"/>
           <a:stretch>
             <a:fillRect/>
           </a:stretch>
@@ -5591,12 +5603,6 @@
               </a:rPr>
               <a:t>数据与可视编码说明</a:t>
             </a:r>
-            <a:endParaRPr lang="zh-CN" altLang="en-US" sz="2800" b="1">
-              <a:solidFill>
-                <a:srgbClr val="563B18"/>
-              </a:solidFill>
-              <a:latin typeface="微软雅黑" panose="020B0503020204020204" pitchFamily="34" charset="-122"/>
-            </a:endParaRPr>
           </a:p>
         </p:txBody>
       </p:sp>
@@ -5656,12 +5662,6 @@
               </a:rPr>
               <a:t>）</a:t>
             </a:r>
-            <a:endParaRPr lang="zh-CN" altLang="en-US" sz="2200">
-              <a:solidFill>
-                <a:srgbClr val="514137"/>
-              </a:solidFill>
-              <a:latin typeface="微软雅黑" panose="020B0503020204020204" pitchFamily="34" charset="-122"/>
-            </a:endParaRPr>
           </a:p>
           <a:p>
             <a:pPr marL="457200" indent="-457200">
@@ -5698,12 +5698,6 @@
               </a:rPr>
               <a:t>）</a:t>
             </a:r>
-            <a:endParaRPr lang="zh-CN" altLang="en-US" sz="2200">
-              <a:solidFill>
-                <a:srgbClr val="514137"/>
-              </a:solidFill>
-              <a:latin typeface="微软雅黑" panose="020B0503020204020204" pitchFamily="34" charset="-122"/>
-            </a:endParaRPr>
           </a:p>
           <a:p>
             <a:pPr marL="457200" indent="-457200">
@@ -5722,12 +5716,6 @@
               </a:rPr>
               <a:t>气泡面积：在线人数</a:t>
             </a:r>
-            <a:endParaRPr lang="zh-CN" altLang="en-US" sz="2200">
-              <a:solidFill>
-                <a:srgbClr val="514137"/>
-              </a:solidFill>
-              <a:latin typeface="微软雅黑" panose="020B0503020204020204" pitchFamily="34" charset="-122"/>
-            </a:endParaRPr>
           </a:p>
           <a:p>
             <a:pPr marL="457200" indent="-457200">
@@ -5746,12 +5734,6 @@
               </a:rPr>
               <a:t>颜色：五个类别</a:t>
             </a:r>
-            <a:endParaRPr lang="zh-CN" altLang="en-US" sz="2200">
-              <a:solidFill>
-                <a:srgbClr val="514137"/>
-              </a:solidFill>
-              <a:latin typeface="微软雅黑" panose="020B0503020204020204" pitchFamily="34" charset="-122"/>
-            </a:endParaRPr>
           </a:p>
         </p:txBody>
       </p:sp>
@@ -5842,7 +5824,7 @@
           <p:nvPr/>
         </p:nvPicPr>
         <p:blipFill>
-          <a:blip r:embed="rId1"/>
+          <a:blip r:embed="rId2"/>
           <a:stretch>
             <a:fillRect/>
           </a:stretch>
@@ -6050,12 +6032,6 @@
               </a:rPr>
               <a:t>原图总览：高信息密度问题</a:t>
             </a:r>
-            <a:endParaRPr lang="zh-CN" altLang="en-US" sz="2800" b="1">
-              <a:solidFill>
-                <a:srgbClr val="563B18"/>
-              </a:solidFill>
-              <a:latin typeface="微软雅黑" panose="020B0503020204020204" pitchFamily="34" charset="-122"/>
-            </a:endParaRPr>
           </a:p>
         </p:txBody>
       </p:sp>
@@ -6095,23 +6071,8 @@
                 </a:solidFill>
                 <a:latin typeface="微软雅黑" panose="020B0503020204020204" pitchFamily="34" charset="-122"/>
               </a:rPr>
-              <a:t>数据小而</a:t>
-            </a:r>
-            <a:r>
-              <a:rPr lang="zh-CN" altLang="en-US">
-                <a:solidFill>
-                  <a:srgbClr val="514137"/>
-                </a:solidFill>
-                <a:latin typeface="微软雅黑" panose="020B0503020204020204" pitchFamily="34" charset="-122"/>
-              </a:rPr>
-              <a:t>密</a:t>
-            </a:r>
-            <a:endParaRPr lang="zh-CN" altLang="en-US">
-              <a:solidFill>
-                <a:srgbClr val="514137"/>
-              </a:solidFill>
-              <a:latin typeface="微软雅黑" panose="020B0503020204020204" pitchFamily="34" charset="-122"/>
-            </a:endParaRPr>
+              <a:t>数据小而密</a:t>
+            </a:r>
           </a:p>
           <a:p>
             <a:pPr marL="342900" indent="-342900">
@@ -6128,23 +6089,8 @@
                 </a:solidFill>
                 <a:latin typeface="微软雅黑" panose="020B0503020204020204" pitchFamily="34" charset="-122"/>
               </a:rPr>
-              <a:t>不够</a:t>
-            </a:r>
-            <a:r>
-              <a:rPr lang="zh-CN" altLang="en-US">
-                <a:solidFill>
-                  <a:srgbClr val="514137"/>
-                </a:solidFill>
-                <a:latin typeface="微软雅黑" panose="020B0503020204020204" pitchFamily="34" charset="-122"/>
-              </a:rPr>
-              <a:t>直观</a:t>
-            </a:r>
-            <a:endParaRPr lang="zh-CN" altLang="en-US">
-              <a:solidFill>
-                <a:srgbClr val="514137"/>
-              </a:solidFill>
-              <a:latin typeface="微软雅黑" panose="020B0503020204020204" pitchFamily="34" charset="-122"/>
-            </a:endParaRPr>
+              <a:t>不够直观</a:t>
+            </a:r>
           </a:p>
           <a:p>
             <a:pPr marL="342900" indent="-342900">
@@ -6163,12 +6109,6 @@
               </a:rPr>
               <a:t>主次层级竞争明显</a:t>
             </a:r>
-            <a:endParaRPr lang="zh-CN" altLang="en-US">
-              <a:solidFill>
-                <a:srgbClr val="514137"/>
-              </a:solidFill>
-              <a:latin typeface="微软雅黑" panose="020B0503020204020204" pitchFamily="34" charset="-122"/>
-            </a:endParaRPr>
           </a:p>
           <a:p>
             <a:pPr marL="342900" indent="-342900">
@@ -6185,23 +6125,8 @@
                 </a:solidFill>
                 <a:latin typeface="微软雅黑" panose="020B0503020204020204" pitchFamily="34" charset="-122"/>
               </a:rPr>
-              <a:t>难以比较多个游戏之间的</a:t>
-            </a:r>
-            <a:r>
-              <a:rPr lang="zh-CN" altLang="en-US">
-                <a:solidFill>
-                  <a:srgbClr val="514137"/>
-                </a:solidFill>
-                <a:latin typeface="微软雅黑" panose="020B0503020204020204" pitchFamily="34" charset="-122"/>
-              </a:rPr>
-              <a:t>关系</a:t>
-            </a:r>
-            <a:endParaRPr lang="zh-CN" altLang="en-US">
-              <a:solidFill>
-                <a:srgbClr val="514137"/>
-              </a:solidFill>
-              <a:latin typeface="微软雅黑" panose="020B0503020204020204" pitchFamily="34" charset="-122"/>
-            </a:endParaRPr>
+              <a:t>难以比较多个游戏之间的关系</a:t>
+            </a:r>
           </a:p>
         </p:txBody>
       </p:sp>
@@ -6292,7 +6217,7 @@
           <p:nvPr/>
         </p:nvPicPr>
         <p:blipFill>
-          <a:blip r:embed="rId1"/>
+          <a:blip r:embed="rId2"/>
           <a:stretch>
             <a:fillRect/>
           </a:stretch>
@@ -6500,12 +6425,6 @@
               </a:rPr>
               <a:t>原图问题一：对比敏感度</a:t>
             </a:r>
-            <a:endParaRPr lang="zh-CN" altLang="en-US" sz="2800" b="1">
-              <a:solidFill>
-                <a:srgbClr val="563B18"/>
-              </a:solidFill>
-              <a:latin typeface="微软雅黑" panose="020B0503020204020204" pitchFamily="34" charset="-122"/>
-            </a:endParaRPr>
           </a:p>
         </p:txBody>
       </p:sp>
@@ -6540,12 +6459,6 @@
               </a:rPr>
               <a:t>对比敏感度不足会让小字号和低对比对象难以识别，增加误读风险。</a:t>
             </a:r>
-            <a:endParaRPr lang="zh-CN" altLang="en-US">
-              <a:solidFill>
-                <a:srgbClr val="544034"/>
-              </a:solidFill>
-              <a:latin typeface="微软雅黑" panose="020B0503020204020204" pitchFamily="34" charset="-122"/>
-            </a:endParaRPr>
           </a:p>
         </p:txBody>
       </p:sp>
@@ -6636,7 +6549,7 @@
           <p:nvPr/>
         </p:nvPicPr>
         <p:blipFill>
-          <a:blip r:embed="rId1"/>
+          <a:blip r:embed="rId2"/>
           <a:stretch>
             <a:fillRect/>
           </a:stretch>
@@ -6844,12 +6757,6 @@
               </a:rPr>
               <a:t>原图问题二：认知负担</a:t>
             </a:r>
-            <a:endParaRPr lang="zh-CN" altLang="en-US" sz="2800" b="1">
-              <a:solidFill>
-                <a:srgbClr val="563B18"/>
-              </a:solidFill>
-              <a:latin typeface="微软雅黑" panose="020B0503020204020204" pitchFamily="34" charset="-122"/>
-            </a:endParaRPr>
           </a:p>
         </p:txBody>
       </p:sp>
@@ -6930,23 +6837,8 @@
                 </a:solidFill>
                 <a:latin typeface="微软雅黑" panose="020B0503020204020204" pitchFamily="34" charset="-122"/>
               </a:rPr>
-              <a:t>样例数量多时难以比较和观察</a:t>
-            </a:r>
-            <a:r>
-              <a:rPr lang="zh-CN" altLang="en-US" sz="2000">
-                <a:solidFill>
-                  <a:srgbClr val="514137"/>
-                </a:solidFill>
-                <a:latin typeface="微软雅黑" panose="020B0503020204020204" pitchFamily="34" charset="-122"/>
-              </a:rPr>
-              <a:t>全貌</a:t>
-            </a:r>
-            <a:endParaRPr lang="zh-CN" altLang="en-US" sz="2000">
-              <a:solidFill>
-                <a:srgbClr val="514137"/>
-              </a:solidFill>
-              <a:latin typeface="微软雅黑" panose="020B0503020204020204" pitchFamily="34" charset="-122"/>
-            </a:endParaRPr>
+              <a:t>样例数量多时难以比较和观察全貌</a:t>
+            </a:r>
           </a:p>
           <a:p>
             <a:pPr marL="457200" indent="-457200">
@@ -6963,23 +6855,8 @@
                 </a:solidFill>
                 <a:latin typeface="微软雅黑" panose="020B0503020204020204" pitchFamily="34" charset="-122"/>
               </a:rPr>
-              <a:t>图例映射路径偏长，难以找到准确</a:t>
-            </a:r>
-            <a:r>
-              <a:rPr lang="zh-CN" altLang="en-US" sz="2000">
-                <a:solidFill>
-                  <a:srgbClr val="514137"/>
-                </a:solidFill>
-                <a:latin typeface="微软雅黑" panose="020B0503020204020204" pitchFamily="34" charset="-122"/>
-              </a:rPr>
-              <a:t>点</a:t>
-            </a:r>
-            <a:endParaRPr lang="zh-CN" altLang="en-US" sz="2000">
-              <a:solidFill>
-                <a:srgbClr val="514137"/>
-              </a:solidFill>
-              <a:latin typeface="微软雅黑" panose="020B0503020204020204" pitchFamily="34" charset="-122"/>
-            </a:endParaRPr>
+              <a:t>图例映射路径偏长，难以找到准确点</a:t>
+            </a:r>
           </a:p>
           <a:p>
             <a:pPr marL="457200" indent="-457200">
@@ -6998,12 +6875,6 @@
               </a:rPr>
               <a:t>注意力切换频繁</a:t>
             </a:r>
-            <a:endParaRPr lang="zh-CN" altLang="en-US" sz="2000">
-              <a:solidFill>
-                <a:srgbClr val="514137"/>
-              </a:solidFill>
-              <a:latin typeface="微软雅黑" panose="020B0503020204020204" pitchFamily="34" charset="-122"/>
-            </a:endParaRPr>
           </a:p>
           <a:p>
             <a:pPr marL="457200" indent="-457200">
@@ -7020,23 +6891,8 @@
                 </a:solidFill>
                 <a:latin typeface="微软雅黑" panose="020B0503020204020204" pitchFamily="34" charset="-122"/>
               </a:rPr>
-              <a:t>颜色杂乱相间，令人</a:t>
-            </a:r>
-            <a:r>
-              <a:rPr lang="zh-CN" altLang="en-US" sz="2000">
-                <a:solidFill>
-                  <a:srgbClr val="514137"/>
-                </a:solidFill>
-                <a:latin typeface="微软雅黑" panose="020B0503020204020204" pitchFamily="34" charset="-122"/>
-              </a:rPr>
-              <a:t>眼花</a:t>
-            </a:r>
-            <a:endParaRPr lang="zh-CN" altLang="en-US" sz="2000">
-              <a:solidFill>
-                <a:srgbClr val="514137"/>
-              </a:solidFill>
-              <a:latin typeface="微软雅黑" panose="020B0503020204020204" pitchFamily="34" charset="-122"/>
-            </a:endParaRPr>
+              <a:t>颜色杂乱相间，令人眼花</a:t>
+            </a:r>
           </a:p>
         </p:txBody>
       </p:sp>
@@ -7127,7 +6983,7 @@
           <p:nvPr/>
         </p:nvPicPr>
         <p:blipFill>
-          <a:blip r:embed="rId1"/>
+          <a:blip r:embed="rId2"/>
           <a:stretch>
             <a:fillRect/>
           </a:stretch>
@@ -7335,12 +7191,6 @@
               </a:rPr>
               <a:t>改进图总览：读图路径优化</a:t>
             </a:r>
-            <a:endParaRPr lang="zh-CN" altLang="en-US" sz="2800" b="1">
-              <a:solidFill>
-                <a:srgbClr val="563B18"/>
-              </a:solidFill>
-              <a:latin typeface="微软雅黑" panose="020B0503020204020204" pitchFamily="34" charset="-122"/>
-            </a:endParaRPr>
           </a:p>
         </p:txBody>
       </p:sp>
@@ -7423,12 +7273,6 @@
               </a:rPr>
               <a:t>分区更明确</a:t>
             </a:r>
-            <a:endParaRPr lang="zh-CN" altLang="en-US">
-              <a:solidFill>
-                <a:srgbClr val="514137"/>
-              </a:solidFill>
-              <a:latin typeface="微软雅黑" panose="020B0503020204020204" pitchFamily="34" charset="-122"/>
-            </a:endParaRPr>
           </a:p>
           <a:p>
             <a:pPr marL="342900" indent="-342900">
@@ -7447,12 +7291,6 @@
               </a:rPr>
               <a:t>图例与主图区协同</a:t>
             </a:r>
-            <a:endParaRPr lang="zh-CN" altLang="en-US">
-              <a:solidFill>
-                <a:srgbClr val="514137"/>
-              </a:solidFill>
-              <a:latin typeface="微软雅黑" panose="020B0503020204020204" pitchFamily="34" charset="-122"/>
-            </a:endParaRPr>
           </a:p>
           <a:p>
             <a:pPr marL="342900" indent="-342900">
@@ -7471,12 +7309,6 @@
               </a:rPr>
               <a:t>高对比增强可读性</a:t>
             </a:r>
-            <a:endParaRPr lang="zh-CN" altLang="en-US">
-              <a:solidFill>
-                <a:srgbClr val="514137"/>
-              </a:solidFill>
-              <a:latin typeface="微软雅黑" panose="020B0503020204020204" pitchFamily="34" charset="-122"/>
-            </a:endParaRPr>
           </a:p>
           <a:p>
             <a:pPr marL="342900" indent="-342900">
@@ -7495,12 +7327,6 @@
               </a:rPr>
               <a:t>读图路径更稳定</a:t>
             </a:r>
-            <a:endParaRPr lang="zh-CN" altLang="en-US">
-              <a:solidFill>
-                <a:srgbClr val="514137"/>
-              </a:solidFill>
-              <a:latin typeface="微软雅黑" panose="020B0503020204020204" pitchFamily="34" charset="-122"/>
-            </a:endParaRPr>
           </a:p>
           <a:p>
             <a:pPr marL="342900" indent="-342900">
@@ -7517,23 +7343,8 @@
                 </a:solidFill>
                 <a:latin typeface="微软雅黑" panose="020B0503020204020204" pitchFamily="34" charset="-122"/>
               </a:rPr>
-              <a:t>鼠标放置可以显示详细</a:t>
-            </a:r>
-            <a:r>
-              <a:rPr lang="zh-CN" altLang="en-US">
-                <a:solidFill>
-                  <a:srgbClr val="514137"/>
-                </a:solidFill>
-                <a:latin typeface="微软雅黑" panose="020B0503020204020204" pitchFamily="34" charset="-122"/>
-              </a:rPr>
-              <a:t>信息</a:t>
-            </a:r>
-            <a:endParaRPr lang="zh-CN" altLang="en-US">
-              <a:solidFill>
-                <a:srgbClr val="514137"/>
-              </a:solidFill>
-              <a:latin typeface="微软雅黑" panose="020B0503020204020204" pitchFamily="34" charset="-122"/>
-            </a:endParaRPr>
+              <a:t>鼠标放置可以显示详细信息</a:t>
+            </a:r>
           </a:p>
         </p:txBody>
       </p:sp>
@@ -7624,7 +7435,7 @@
           <p:nvPr/>
         </p:nvPicPr>
         <p:blipFill>
-          <a:blip r:embed="rId1"/>
+          <a:blip r:embed="rId2"/>
           <a:stretch>
             <a:fillRect/>
           </a:stretch>
@@ -7850,12 +7661,6 @@
               </a:rPr>
               <a:t>大作</a:t>
             </a:r>
-            <a:endParaRPr lang="zh-CN" altLang="en-US" sz="2800" b="1">
-              <a:solidFill>
-                <a:srgbClr val="563B18"/>
-              </a:solidFill>
-              <a:latin typeface="微软雅黑" panose="020B0503020204020204" pitchFamily="34" charset="-122"/>
-            </a:endParaRPr>
           </a:p>
         </p:txBody>
       </p:sp>
@@ -7938,12 +7743,6 @@
               </a:rPr>
               <a:t>单类别后密度下降</a:t>
             </a:r>
-            <a:endParaRPr lang="zh-CN" altLang="en-US">
-              <a:solidFill>
-                <a:srgbClr val="514137"/>
-              </a:solidFill>
-              <a:latin typeface="微软雅黑" panose="020B0503020204020204" pitchFamily="34" charset="-122"/>
-            </a:endParaRPr>
           </a:p>
           <a:p>
             <a:pPr marL="342900" indent="-342900">
@@ -7962,12 +7761,6 @@
               </a:rPr>
               <a:t>更易定位离群点</a:t>
             </a:r>
-            <a:endParaRPr lang="zh-CN" altLang="en-US">
-              <a:solidFill>
-                <a:srgbClr val="514137"/>
-              </a:solidFill>
-              <a:latin typeface="微软雅黑" panose="020B0503020204020204" pitchFamily="34" charset="-122"/>
-            </a:endParaRPr>
           </a:p>
           <a:p>
             <a:pPr marL="342900" indent="-342900">
@@ -7986,12 +7779,6 @@
               </a:rPr>
               <a:t>价格评分关系更清晰</a:t>
             </a:r>
-            <a:endParaRPr lang="zh-CN" altLang="en-US">
-              <a:solidFill>
-                <a:srgbClr val="514137"/>
-              </a:solidFill>
-              <a:latin typeface="微软雅黑" panose="020B0503020204020204" pitchFamily="34" charset="-122"/>
-            </a:endParaRPr>
           </a:p>
           <a:p>
             <a:pPr marL="342900" indent="-342900">
@@ -8010,12 +7797,6 @@
               </a:rPr>
               <a:t>有助于局部分析</a:t>
             </a:r>
-            <a:endParaRPr lang="zh-CN" altLang="en-US">
-              <a:solidFill>
-                <a:srgbClr val="514137"/>
-              </a:solidFill>
-              <a:latin typeface="微软雅黑" panose="020B0503020204020204" pitchFamily="34" charset="-122"/>
-            </a:endParaRPr>
           </a:p>
         </p:txBody>
       </p:sp>
@@ -8106,7 +7887,7 @@
           <p:nvPr/>
         </p:nvPicPr>
         <p:blipFill>
-          <a:blip r:embed="rId1"/>
+          <a:blip r:embed="rId2"/>
           <a:stretch>
             <a:fillRect/>
           </a:stretch>
@@ -8314,12 +8095,6 @@
               </a:rPr>
               <a:t>分类视图：中型爆款</a:t>
             </a:r>
-            <a:endParaRPr lang="zh-CN" altLang="en-US" sz="2800" b="1">
-              <a:solidFill>
-                <a:srgbClr val="563B18"/>
-              </a:solidFill>
-              <a:latin typeface="微软雅黑" panose="020B0503020204020204" pitchFamily="34" charset="-122"/>
-            </a:endParaRPr>
           </a:p>
         </p:txBody>
       </p:sp>
@@ -8402,12 +8177,6 @@
               </a:rPr>
               <a:t>观察中价位聚集区</a:t>
             </a:r>
-            <a:endParaRPr lang="zh-CN" altLang="en-US">
-              <a:solidFill>
-                <a:srgbClr val="514137"/>
-              </a:solidFill>
-              <a:latin typeface="微软雅黑" panose="020B0503020204020204" pitchFamily="34" charset="-122"/>
-            </a:endParaRPr>
           </a:p>
           <a:p>
             <a:pPr marL="342900" indent="-342900">
@@ -8426,12 +8195,6 @@
               </a:rPr>
               <a:t>比较同类内部差异</a:t>
             </a:r>
-            <a:endParaRPr lang="zh-CN" altLang="en-US">
-              <a:solidFill>
-                <a:srgbClr val="514137"/>
-              </a:solidFill>
-              <a:latin typeface="微软雅黑" panose="020B0503020204020204" pitchFamily="34" charset="-122"/>
-            </a:endParaRPr>
           </a:p>
           <a:p>
             <a:pPr marL="342900" indent="-342900">
@@ -8450,12 +8213,6 @@
               </a:rPr>
               <a:t>验证筛选价值</a:t>
             </a:r>
-            <a:endParaRPr lang="zh-CN" altLang="en-US">
-              <a:solidFill>
-                <a:srgbClr val="514137"/>
-              </a:solidFill>
-              <a:latin typeface="微软雅黑" panose="020B0503020204020204" pitchFamily="34" charset="-122"/>
-            </a:endParaRPr>
           </a:p>
           <a:p>
             <a:pPr marL="342900" indent="-342900">
@@ -8474,12 +8231,6 @@
               </a:rPr>
               <a:t>支持层次化阅读</a:t>
             </a:r>
-            <a:endParaRPr lang="zh-CN" altLang="en-US">
-              <a:solidFill>
-                <a:srgbClr val="514137"/>
-              </a:solidFill>
-              <a:latin typeface="微软雅黑" panose="020B0503020204020204" pitchFamily="34" charset="-122"/>
-            </a:endParaRPr>
           </a:p>
         </p:txBody>
       </p:sp>
@@ -8570,7 +8321,7 @@
           <p:nvPr/>
         </p:nvPicPr>
         <p:blipFill>
-          <a:blip r:embed="rId1"/>
+          <a:blip r:embed="rId2"/>
           <a:stretch>
             <a:fillRect/>
           </a:stretch>
@@ -8844,6 +8595,8 @@
       </a:bgFillStyleLst>
     </a:fmtScheme>
   </a:themeElements>
+  <a:objectDefaults/>
+  <a:extraClrSchemeLst/>
   <a:extLst>
     <a:ext uri="{05A4C25C-085E-4340-85A3-A5531E510DB2}">
       <thm15:themeFamily xmlns:thm15="http://schemas.microsoft.com/office/thememl/2012/main" name="Office Theme" id="{62F939B6-93AF-4DB8-9C6B-D6C7DFDC589F}" vid="{4A3C46E8-61CC-4603-A589-7422A47A8E4A}"/>
